--- a/dist/초3/과학/건강과탐구/초3_과학_건강과탐구_01_관찰기록하기.pptx
+++ b/dist/초3/과학/건강과탐구/초3_과학_건강과탐구_01_관찰기록하기.pptx
@@ -121,20 +121,20 @@
   <p:extLst>
     <p:ext uri="{521415D9-36F7-43E2-AB2F-B90AF26B5E84}">
       <p14:sectionLst xmlns:p14="http://schemas.microsoft.com/office/powerpoint/2010/main">
-        <p14:section name="도입" id="{87a146a1-bf77-be8d-1fe4-01dd90f86b83}">
+        <p14:section name="도입" id="{2be54c35-672d-850b-1571-b96d98deb8de}">
           <p14:sldIdLst>
             <p14:sldId id="256"/>
             <p14:sldId id="257"/>
           </p14:sldIdLst>
         </p14:section>
-        <p14:section name="개념" id="{b2aae463-99cd-f3f8-ee05-ab24b8e2b144}">
+        <p14:section name="개념" id="{ac05e060-2b01-934f-9289-09ee1fcff411}">
           <p14:sldIdLst>
             <p14:sldId id="258"/>
             <p14:sldId id="261"/>
             <p14:sldId id="265"/>
           </p14:sldIdLst>
         </p14:section>
-        <p14:section name="연습" id="{a622dc08-8a2b-d974-d424-f07e87ec38b9}">
+        <p14:section name="연습" id="{ef1d1df2-af72-9258-b47d-c2bd55dd2f2e}">
           <p14:sldIdLst>
             <p14:sldId id="259"/>
             <p14:sldId id="260"/>
@@ -143,28 +143,28 @@
             <p14:sldId id="264"/>
           </p14:sldIdLst>
         </p14:section>
-        <p14:section name="개념" id="{b05ce8eb-d9b5-0684-c82e-0529f2d59c01}">
+        <p14:section name="개념" id="{7f6bb63b-eb16-2026-b74c-6b1c7c5282fd}">
           <p14:sldIdLst/>
         </p14:section>
-        <p14:section name="연습" id="{6ff4ea3a-ca1e-3e1a-0697-6b65fe1fb14a}">
+        <p14:section name="연습" id="{67c93d9f-538d-e8d6-d333-8f32f67821af}">
           <p14:sldIdLst/>
         </p14:section>
-        <p14:section name="개념" id="{e3179a07-178f-2378-3042-33df8d1fbe88}">
+        <p14:section name="개념" id="{52e468f9-5bd3-c14a-8f5d-0381a9a5cf15}">
           <p14:sldIdLst/>
         </p14:section>
-        <p14:section name="확인" id="{25c57263-c161-04cb-8e6e-5a475069def8}">
+        <p14:section name="확인" id="{82f60982-ecbe-bd17-751d-6d0ddb0fa107}">
           <p14:sldIdLst>
             <p14:sldId id="266"/>
             <p14:sldId id="267"/>
             <p14:sldId id="268"/>
           </p14:sldIdLst>
         </p14:section>
-        <p14:section name="정리" id="{21b9ceea-f787-62ce-a822-c7413409018e}">
+        <p14:section name="정리" id="{79468882-87a1-8872-9b52-0f0f2cf81f1e}">
           <p14:sldIdLst>
             <p14:sldId id="269"/>
           </p14:sldIdLst>
         </p14:section>
-        <p14:section name="보충" id="{b7b52923-2f44-8355-fec5-9a61ce8899b5}">
+        <p14:section name="보충" id="{8483cc03-1af6-dc1f-e5a3-cb7ff63ac8ca}">
           <p14:sldIdLst>
             <p14:sldId id="270"/>
           </p14:sldIdLst>
